--- a/plugin/tests/fixtures/pptx/ecosystem_bc/templates/orphan-and-dangling.pptx
+++ b/plugin/tests/fixtures/pptx/ecosystem_bc/templates/orphan-and-dangling.pptx
@@ -512,6 +512,9 @@
             <a:off x="457200" y="1402080"/>
             <a:ext cx="8229600" cy="5090160"/>
           </a:xfrm>
+          <a:prstGeom prst="rect">
+            <a:avLst/>
+          </a:prstGeom>
           <a:solidFill>
             <a:srgbClr val="FFFFFF"/>
           </a:solidFill>
@@ -520,9 +523,6 @@
               <a:srgbClr val="D9E2F3"/>
             </a:solidFill>
           </a:ln>
-          <a:prstGeom prst="rect">
-            <a:avLst/>
-          </a:prstGeom>
         </p:spPr>
         <p:txBody>
           <a:bodyPr/>
@@ -546,10 +546,10 @@
           <p:cNvGraphicFramePr/>
           <p:nvPr/>
         </p:nvGraphicFramePr>
-        <a:xfrm>
+        <p:xfrm>
           <a:off x="457200" y="1402080"/>
           <a:ext cx="8229600" cy="5090160"/>
-        </a:xfrm>
+        </p:xfrm>
         <a:graphic>
           <a:graphicData uri="http://schemas.openxmlformats.org/drawingml/2006/chart">
             <c:chart r:id="rIdChart"/>
@@ -654,11 +654,25 @@
           <a:schemeClr val="phClr"/>
         </a:solidFill>
         <a:gradFill>
-          <a:gsLst/>
+          <a:gsLst>
+            <a:gs pos="0">
+              <a:schemeClr val="phClr"/>
+            </a:gs>
+            <a:gs pos="100000">
+              <a:schemeClr val="phClr"/>
+            </a:gs>
+          </a:gsLst>
           <a:lin ang="0" scaled="0"/>
         </a:gradFill>
         <a:gradFill>
-          <a:gsLst/>
+          <a:gsLst>
+            <a:gs pos="0">
+              <a:schemeClr val="phClr"/>
+            </a:gs>
+            <a:gs pos="100000">
+              <a:schemeClr val="phClr"/>
+            </a:gs>
+          </a:gsLst>
           <a:lin ang="0" scaled="0"/>
         </a:gradFill>
       </a:fillStyleLst>

--- a/plugin/tests/fixtures/pptx/ecosystem_bc/templates/orphan-and-dangling.pptx
+++ b/plugin/tests/fixtures/pptx/ecosystem_bc/templates/orphan-and-dangling.pptx
@@ -721,4 +721,132 @@
     </a:fmtScheme>
   </a:themeElements>
 </a:theme>
+</file>
+
+<file path=ppt/theme/theme2.xml><?xml version="1.0" encoding="utf-8"?>
+<a:theme xmlns:a="http://schemas.openxmlformats.org/drawingml/2006/main" name="Elftia Office">
+  <a:themeElements>
+    <a:clrScheme name="Elftia Office">
+      <a:dk1>
+        <a:sysClr val="windowText" lastClr="000000"/>
+      </a:dk1>
+      <a:lt1>
+        <a:sysClr val="window" lastClr="FFFFFF"/>
+      </a:lt1>
+      <a:dk2>
+        <a:srgbClr val="44546A"/>
+      </a:dk2>
+      <a:lt2>
+        <a:srgbClr val="E7E6E6"/>
+      </a:lt2>
+      <a:accent1>
+        <a:srgbClr val="4472C4"/>
+      </a:accent1>
+      <a:accent2>
+        <a:srgbClr val="ED7D31"/>
+      </a:accent2>
+      <a:accent3>
+        <a:srgbClr val="A5A5A5"/>
+      </a:accent3>
+      <a:accent4>
+        <a:srgbClr val="FFC000"/>
+      </a:accent4>
+      <a:accent5>
+        <a:srgbClr val="5B9BD5"/>
+      </a:accent5>
+      <a:accent6>
+        <a:srgbClr val="70AD47"/>
+      </a:accent6>
+      <a:hlink>
+        <a:srgbClr val="0563C1"/>
+      </a:hlink>
+      <a:folHlink>
+        <a:srgbClr val="954F72"/>
+      </a:folHlink>
+    </a:clrScheme>
+    <a:fontScheme name="Elftia Office">
+      <a:majorFont>
+        <a:latin typeface="Calibri Light"/>
+        <a:ea typeface=""/>
+        <a:cs typeface=""/>
+      </a:majorFont>
+      <a:minorFont>
+        <a:latin typeface="Calibri"/>
+        <a:ea typeface=""/>
+        <a:cs typeface=""/>
+      </a:minorFont>
+    </a:fontScheme>
+    <a:fmtScheme>
+      <a:fillStyleLst>
+        <a:solidFill>
+          <a:schemeClr val="phClr"/>
+        </a:solidFill>
+        <a:gradFill>
+          <a:gsLst>
+            <a:gs pos="0">
+              <a:schemeClr val="phClr"/>
+            </a:gs>
+            <a:gs pos="100000">
+              <a:schemeClr val="phClr"/>
+            </a:gs>
+          </a:gsLst>
+          <a:lin ang="0" scaled="0"/>
+        </a:gradFill>
+        <a:gradFill>
+          <a:gsLst>
+            <a:gs pos="0">
+              <a:schemeClr val="phClr"/>
+            </a:gs>
+            <a:gs pos="100000">
+              <a:schemeClr val="phClr"/>
+            </a:gs>
+          </a:gsLst>
+          <a:lin ang="0" scaled="0"/>
+        </a:gradFill>
+      </a:fillStyleLst>
+      <a:lnStyleLst>
+        <a:ln w="9100" cap="flat" cmpd="sng" algn="ctr">
+          <a:solidFill>
+            <a:schemeClr val="phClr"/>
+          </a:solidFill>
+          <a:prstDash val="solid"/>
+        </a:ln>
+        <a:ln w="9100" cap="flat" cmpd="sng" algn="ctr">
+          <a:solidFill>
+            <a:schemeClr val="phClr"/>
+          </a:solidFill>
+          <a:prstDash val="solid"/>
+        </a:ln>
+        <a:ln w="9100" cap="flat" cmpd="sng" algn="ctr">
+          <a:solidFill>
+            <a:schemeClr val="phClr"/>
+          </a:solidFill>
+          <a:prstDash val="solid"/>
+        </a:ln>
+      </a:lnStyleLst>
+      <a:effectStyleLst>
+        <a:effectStyle>
+          <a:effectLst/>
+        </a:effectStyle>
+        <a:effectStyle>
+          <a:effectLst/>
+        </a:effectStyle>
+        <a:effectStyle>
+          <a:effectLst/>
+        </a:effectStyle>
+      </a:effectStyleLst>
+      <a:bgFillStyleLst>
+        <a:solidFill>
+          <a:schemeClr val="phClr"/>
+        </a:solidFill>
+        <a:solidFill>
+          <a:schemeClr val="phClr"/>
+        </a:solidFill>
+        <a:solidFill>
+          <a:schemeClr val="phClr"/>
+        </a:solidFill>
+      </a:bgFillStyleLst>
+    </a:fmtScheme>
+  </a:themeElements>
+</a:theme>
 </file>